--- a/livro_ia_educacao/saida/pptx/Cap29_slides.pptx
+++ b/livro_ia_educacao/saida/pptx/Cap29_slides.pptx
@@ -9959,11 +9959,11 @@
         <p:spPr>
           <a:xfrm>
             <a:off x="548640" y="1417320"/>
-            <a:ext cx="11064240" cy="762000"/>
+            <a:ext cx="11064240" cy="682752"/>
           </a:xfrm>
           <a:prstGeom prst="roundRect">
             <a:avLst>
-              <a:gd name="adj" fmla="val 14400"/>
+              <a:gd name="adj" fmla="val 16071"/>
             </a:avLst>
           </a:prstGeom>
           <a:solidFill>
@@ -9990,7 +9990,7 @@
         <p:spPr>
           <a:xfrm>
             <a:off x="731520" y="1417320"/>
-            <a:ext cx="548640" cy="762000"/>
+            <a:ext cx="548640" cy="682752"/>
           </a:xfrm>
           <a:prstGeom prst="rect">
             <a:avLst/>
@@ -10026,7 +10026,7 @@
         <p:spPr>
           <a:xfrm>
             <a:off x="1463040" y="1417320"/>
-            <a:ext cx="9966960" cy="762000"/>
+            <a:ext cx="9966960" cy="682752"/>
           </a:xfrm>
           <a:prstGeom prst="rect">
             <a:avLst/>
@@ -10061,12 +10061,12 @@
         </p:nvSpPr>
         <p:spPr>
           <a:xfrm>
-            <a:off x="548640" y="2289048"/>
-            <a:ext cx="11064240" cy="762000"/>
+            <a:off x="548640" y="2209800"/>
+            <a:ext cx="11064240" cy="682752"/>
           </a:xfrm>
           <a:prstGeom prst="roundRect">
             <a:avLst>
-              <a:gd name="adj" fmla="val 14400"/>
+              <a:gd name="adj" fmla="val 16071"/>
             </a:avLst>
           </a:prstGeom>
           <a:solidFill>
@@ -10092,8 +10092,8 @@
         </p:nvSpPr>
         <p:spPr>
           <a:xfrm>
-            <a:off x="731520" y="2289048"/>
-            <a:ext cx="548640" cy="762000"/>
+            <a:off x="731520" y="2209800"/>
+            <a:ext cx="548640" cy="682752"/>
           </a:xfrm>
           <a:prstGeom prst="rect">
             <a:avLst/>
@@ -10128,8 +10128,8 @@
         </p:nvSpPr>
         <p:spPr>
           <a:xfrm>
-            <a:off x="1463040" y="2289048"/>
-            <a:ext cx="9966960" cy="762000"/>
+            <a:off x="1463040" y="2209800"/>
+            <a:ext cx="9966960" cy="682752"/>
           </a:xfrm>
           <a:prstGeom prst="rect">
             <a:avLst/>
@@ -10164,12 +10164,12 @@
         </p:nvSpPr>
         <p:spPr>
           <a:xfrm>
-            <a:off x="548640" y="3160776"/>
-            <a:ext cx="11064240" cy="762000"/>
+            <a:off x="548640" y="3002280"/>
+            <a:ext cx="11064240" cy="682752"/>
           </a:xfrm>
           <a:prstGeom prst="roundRect">
             <a:avLst>
-              <a:gd name="adj" fmla="val 14400"/>
+              <a:gd name="adj" fmla="val 16071"/>
             </a:avLst>
           </a:prstGeom>
           <a:solidFill>
@@ -10195,8 +10195,8 @@
         </p:nvSpPr>
         <p:spPr>
           <a:xfrm>
-            <a:off x="731520" y="3160776"/>
-            <a:ext cx="548640" cy="762000"/>
+            <a:off x="731520" y="3002280"/>
+            <a:ext cx="548640" cy="682752"/>
           </a:xfrm>
           <a:prstGeom prst="rect">
             <a:avLst/>
@@ -10231,8 +10231,8 @@
         </p:nvSpPr>
         <p:spPr>
           <a:xfrm>
-            <a:off x="1463040" y="3160776"/>
-            <a:ext cx="9966960" cy="762000"/>
+            <a:off x="1463040" y="3002280"/>
+            <a:ext cx="9966960" cy="682752"/>
           </a:xfrm>
           <a:prstGeom prst="rect">
             <a:avLst/>
@@ -10267,12 +10267,12 @@
         </p:nvSpPr>
         <p:spPr>
           <a:xfrm>
-            <a:off x="548640" y="4032504"/>
-            <a:ext cx="11064240" cy="762000"/>
+            <a:off x="548640" y="3794760"/>
+            <a:ext cx="11064240" cy="682752"/>
           </a:xfrm>
           <a:prstGeom prst="roundRect">
             <a:avLst>
-              <a:gd name="adj" fmla="val 14400"/>
+              <a:gd name="adj" fmla="val 16071"/>
             </a:avLst>
           </a:prstGeom>
           <a:solidFill>
@@ -10298,8 +10298,8 @@
         </p:nvSpPr>
         <p:spPr>
           <a:xfrm>
-            <a:off x="731520" y="4032504"/>
-            <a:ext cx="548640" cy="762000"/>
+            <a:off x="731520" y="3794760"/>
+            <a:ext cx="548640" cy="682752"/>
           </a:xfrm>
           <a:prstGeom prst="rect">
             <a:avLst/>
@@ -10334,8 +10334,8 @@
         </p:nvSpPr>
         <p:spPr>
           <a:xfrm>
-            <a:off x="1463040" y="4032504"/>
-            <a:ext cx="9966960" cy="762000"/>
+            <a:off x="1463040" y="3794760"/>
+            <a:ext cx="9966960" cy="682752"/>
           </a:xfrm>
           <a:prstGeom prst="rect">
             <a:avLst/>
@@ -10370,12 +10370,12 @@
         </p:nvSpPr>
         <p:spPr>
           <a:xfrm>
-            <a:off x="548640" y="4904232"/>
-            <a:ext cx="11064240" cy="762000"/>
+            <a:off x="548640" y="4587240"/>
+            <a:ext cx="11064240" cy="682752"/>
           </a:xfrm>
           <a:prstGeom prst="roundRect">
             <a:avLst>
-              <a:gd name="adj" fmla="val 14400"/>
+              <a:gd name="adj" fmla="val 16071"/>
             </a:avLst>
           </a:prstGeom>
           <a:solidFill>
@@ -10401,8 +10401,8 @@
         </p:nvSpPr>
         <p:spPr>
           <a:xfrm>
-            <a:off x="731520" y="4904232"/>
-            <a:ext cx="548640" cy="762000"/>
+            <a:off x="731520" y="4587240"/>
+            <a:ext cx="548640" cy="682752"/>
           </a:xfrm>
           <a:prstGeom prst="rect">
             <a:avLst/>
@@ -10437,8 +10437,8 @@
         </p:nvSpPr>
         <p:spPr>
           <a:xfrm>
-            <a:off x="1463040" y="4904232"/>
-            <a:ext cx="9966960" cy="762000"/>
+            <a:off x="1463040" y="4587240"/>
+            <a:ext cx="9966960" cy="682752"/>
           </a:xfrm>
           <a:prstGeom prst="rect">
             <a:avLst/>
@@ -10473,12 +10473,12 @@
         </p:nvSpPr>
         <p:spPr>
           <a:xfrm>
-            <a:off x="548640" y="5775960"/>
-            <a:ext cx="11064240" cy="762000"/>
+            <a:off x="548640" y="5379720"/>
+            <a:ext cx="11064240" cy="682752"/>
           </a:xfrm>
           <a:prstGeom prst="roundRect">
             <a:avLst>
-              <a:gd name="adj" fmla="val 14400"/>
+              <a:gd name="adj" fmla="val 16071"/>
             </a:avLst>
           </a:prstGeom>
           <a:solidFill>
@@ -10504,8 +10504,8 @@
         </p:nvSpPr>
         <p:spPr>
           <a:xfrm>
-            <a:off x="731520" y="5775960"/>
-            <a:ext cx="548640" cy="762000"/>
+            <a:off x="731520" y="5379720"/>
+            <a:ext cx="548640" cy="682752"/>
           </a:xfrm>
           <a:prstGeom prst="rect">
             <a:avLst/>
@@ -10540,8 +10540,8 @@
         </p:nvSpPr>
         <p:spPr>
           <a:xfrm>
-            <a:off x="1463040" y="5775960"/>
-            <a:ext cx="9966960" cy="762000"/>
+            <a:off x="1463040" y="5379720"/>
+            <a:ext cx="9966960" cy="682752"/>
           </a:xfrm>
           <a:prstGeom prst="rect">
             <a:avLst/>
